--- a/documentation/user_guides/suite_overview/AudioSuite-Pro_New_User_Presentation.pptx
+++ b/documentation/user_guides/suite_overview/AudioSuite-Pro_New_User_Presentation.pptx
@@ -18336,7 +18336,7 @@
                 </a:solidFill>
                 <a:latin typeface="Segoe UI"/>
               </a:rPr>
-              <a:t>docs/index.md is the front door - guides, reference and the API</a:t>
+              <a:t>documentation/docs/index.md is the front door - guides, reference and the API</a:t>
             </a:r>
           </a:p>
         </p:txBody>
@@ -18384,7 +18384,7 @@
                 </a:solidFill>
                 <a:latin typeface="Segoe UI"/>
               </a:rPr>
-              <a:t>Each tool's own User Guide - every setting, default value, and step-by-step walkthrough (user_guides/individual_programs/)</a:t>
+              <a:t>Each tool's own User Guide - every setting, default value, and step-by-step walkthrough (documentation/user_guides/individual_programs/)</a:t>
             </a:r>
           </a:p>
           <a:p>
@@ -18409,7 +18409,7 @@
                 </a:solidFill>
                 <a:latin typeface="Segoe UI"/>
               </a:rPr>
-              <a:t>The Suite Overview - how the 30 tools are grouped, and which one to reach for (docs/user/suite-overview.md)</a:t>
+              <a:t>The Suite Overview - how the 30 tools are grouped, and which one to reach for (documentation/docs/user/suite-overview.md)</a:t>
             </a:r>
           </a:p>
           <a:p>
@@ -18459,7 +18459,7 @@
                 </a:solidFill>
                 <a:latin typeface="Segoe UI"/>
               </a:rPr>
-              <a:t>Retries, failure handling and cleanup - what happens when a file or a batch step fails (docs/resilience.md)</a:t>
+              <a:t>Retries, failure handling and cleanup - what happens when a file or a batch step fails (documentation/docs/resilience.md)</a:t>
             </a:r>
           </a:p>
           <a:p>
@@ -18484,7 +18484,7 @@
                 </a:solidFill>
                 <a:latin typeface="Segoe UI"/>
               </a:rPr>
-              <a:t>Security - API keys, credentials, and safe file handling (docs/user/security.md)</a:t>
+              <a:t>Security - API keys, credentials, and safe file handling (documentation/docs/user/security.md)</a:t>
             </a:r>
           </a:p>
           <a:p>
@@ -18509,7 +18509,7 @@
                 </a:solidFill>
                 <a:latin typeface="Segoe UI"/>
               </a:rPr>
-              <a:t>The CLI Commands Reference - every command and option (user_guides/reference/CLI_Commands_Reference.md)</a:t>
+              <a:t>The CLI Commands Reference - every command and option (documentation/user_guides/reference/CLI_Commands_Reference.md)</a:t>
             </a:r>
           </a:p>
         </p:txBody>

--- a/documentation/user_guides/suite_overview/AudioSuite-Pro_New_User_Presentation.pptx
+++ b/documentation/user_guides/suite_overview/AudioSuite-Pro_New_User_Presentation.pptx
@@ -9662,7 +9662,7 @@
                 </a:solidFill>
                 <a:latin typeface="Segoe UI"/>
               </a:rPr>
-              <a:t>A suite of 30 Windows desktop tools for processing, repairing, analysing and tagging a music library - plus one Master Driver that ties them all together.</a:t>
+              <a:t>A suite of 32 Windows desktop tools for processing, repairing, analysing and tagging a music library - plus one Master Driver that ties them all together.</a:t>
             </a:r>
           </a:p>
           <a:p>
@@ -11419,7 +11419,7 @@
                 <a:gridCol w="777240"/>
                 <a:gridCol w="4800600"/>
               </a:tblGrid>
-              <a:tr h="176784">
+              <a:tr h="165735">
                 <a:tc>
                   <a:txBody>
                     <a:bodyPr wrap="square"/>
@@ -11582,7 +11582,7 @@
                   </a:tcPr>
                 </a:tc>
               </a:tr>
-              <a:tr h="176784">
+              <a:tr h="165735">
                 <a:tc>
                   <a:txBody>
                     <a:bodyPr wrap="square"/>
@@ -11745,7 +11745,7 @@
                   </a:tcPr>
                 </a:tc>
               </a:tr>
-              <a:tr h="176784">
+              <a:tr h="165735">
                 <a:tc>
                   <a:txBody>
                     <a:bodyPr wrap="square"/>
@@ -11908,7 +11908,7 @@
                   </a:tcPr>
                 </a:tc>
               </a:tr>
-              <a:tr h="176784">
+              <a:tr h="165735">
                 <a:tc>
                   <a:txBody>
                     <a:bodyPr wrap="square"/>
@@ -12071,7 +12071,7 @@
                   </a:tcPr>
                 </a:tc>
               </a:tr>
-              <a:tr h="176784">
+              <a:tr h="165735">
                 <a:tc>
                   <a:txBody>
                     <a:bodyPr wrap="square"/>
@@ -12234,7 +12234,7 @@
                   </a:tcPr>
                 </a:tc>
               </a:tr>
-              <a:tr h="176784">
+              <a:tr h="165735">
                 <a:tc>
                   <a:txBody>
                     <a:bodyPr wrap="square"/>
@@ -12397,7 +12397,7 @@
                   </a:tcPr>
                 </a:tc>
               </a:tr>
-              <a:tr h="176784">
+              <a:tr h="165735">
                 <a:tc>
                   <a:txBody>
                     <a:bodyPr wrap="square"/>
@@ -12560,7 +12560,7 @@
                   </a:tcPr>
                 </a:tc>
               </a:tr>
-              <a:tr h="176784">
+              <a:tr h="165735">
                 <a:tc>
                   <a:txBody>
                     <a:bodyPr wrap="square"/>
@@ -12723,7 +12723,7 @@
                   </a:tcPr>
                 </a:tc>
               </a:tr>
-              <a:tr h="176784">
+              <a:tr h="165735">
                 <a:tc>
                   <a:txBody>
                     <a:bodyPr wrap="square"/>
@@ -12886,7 +12886,7 @@
                   </a:tcPr>
                 </a:tc>
               </a:tr>
-              <a:tr h="176784">
+              <a:tr h="165735">
                 <a:tc>
                   <a:txBody>
                     <a:bodyPr wrap="square"/>
@@ -13049,7 +13049,7 @@
                   </a:tcPr>
                 </a:tc>
               </a:tr>
-              <a:tr h="176784">
+              <a:tr h="165735">
                 <a:tc>
                   <a:txBody>
                     <a:bodyPr wrap="square"/>
@@ -13212,7 +13212,7 @@
                   </a:tcPr>
                 </a:tc>
               </a:tr>
-              <a:tr h="176784">
+              <a:tr h="165735">
                 <a:tc>
                   <a:txBody>
                     <a:bodyPr wrap="square"/>
@@ -13375,7 +13375,7 @@
                   </a:tcPr>
                 </a:tc>
               </a:tr>
-              <a:tr h="176784">
+              <a:tr h="165735">
                 <a:tc>
                   <a:txBody>
                     <a:bodyPr wrap="square"/>
@@ -13538,7 +13538,7 @@
                   </a:tcPr>
                 </a:tc>
               </a:tr>
-              <a:tr h="176784">
+              <a:tr h="165735">
                 <a:tc>
                   <a:txBody>
                     <a:bodyPr wrap="square"/>
@@ -13701,7 +13701,7 @@
                   </a:tcPr>
                 </a:tc>
               </a:tr>
-              <a:tr h="176784">
+              <a:tr h="165735">
                 <a:tc>
                   <a:txBody>
                     <a:bodyPr wrap="square"/>
@@ -13864,7 +13864,7 @@
                   </a:tcPr>
                 </a:tc>
               </a:tr>
-              <a:tr h="176784">
+              <a:tr h="165735">
                 <a:tc>
                   <a:txBody>
                     <a:bodyPr wrap="square"/>
@@ -14027,7 +14027,7 @@
                   </a:tcPr>
                 </a:tc>
               </a:tr>
-              <a:tr h="176784">
+              <a:tr h="165735">
                 <a:tc>
                   <a:txBody>
                     <a:bodyPr wrap="square"/>
@@ -14190,7 +14190,7 @@
                   </a:tcPr>
                 </a:tc>
               </a:tr>
-              <a:tr h="176784">
+              <a:tr h="165735">
                 <a:tc>
                   <a:txBody>
                     <a:bodyPr wrap="square"/>
@@ -14353,7 +14353,7 @@
                   </a:tcPr>
                 </a:tc>
               </a:tr>
-              <a:tr h="176784">
+              <a:tr h="165735">
                 <a:tc>
                   <a:txBody>
                     <a:bodyPr wrap="square"/>
@@ -14516,7 +14516,7 @@
                   </a:tcPr>
                 </a:tc>
               </a:tr>
-              <a:tr h="176784">
+              <a:tr h="165735">
                 <a:tc>
                   <a:txBody>
                     <a:bodyPr wrap="square"/>
@@ -14679,7 +14679,7 @@
                   </a:tcPr>
                 </a:tc>
               </a:tr>
-              <a:tr h="176784">
+              <a:tr h="165735">
                 <a:tc>
                   <a:txBody>
                     <a:bodyPr wrap="square"/>
@@ -14842,7 +14842,7 @@
                   </a:tcPr>
                 </a:tc>
               </a:tr>
-              <a:tr h="176784">
+              <a:tr h="165735">
                 <a:tc>
                   <a:txBody>
                     <a:bodyPr wrap="square"/>
@@ -15005,7 +15005,7 @@
                   </a:tcPr>
                 </a:tc>
               </a:tr>
-              <a:tr h="176784">
+              <a:tr h="165735">
                 <a:tc>
                   <a:txBody>
                     <a:bodyPr wrap="square"/>
@@ -15168,7 +15168,7 @@
                   </a:tcPr>
                 </a:tc>
               </a:tr>
-              <a:tr h="176784">
+              <a:tr h="165735">
                 <a:tc>
                   <a:txBody>
                     <a:bodyPr wrap="square"/>
@@ -15331,7 +15331,7 @@
                   </a:tcPr>
                 </a:tc>
               </a:tr>
-              <a:tr h="176784">
+              <a:tr h="165735">
                 <a:tc>
                   <a:txBody>
                     <a:bodyPr wrap="square"/>
@@ -15494,7 +15494,7 @@
                   </a:tcPr>
                 </a:tc>
               </a:tr>
-              <a:tr h="176784">
+              <a:tr h="165735">
                 <a:tc>
                   <a:txBody>
                     <a:bodyPr wrap="square"/>
@@ -15657,7 +15657,7 @@
                   </a:tcPr>
                 </a:tc>
               </a:tr>
-              <a:tr h="176784">
+              <a:tr h="165735">
                 <a:tc>
                   <a:txBody>
                     <a:bodyPr wrap="square"/>
@@ -15820,7 +15820,7 @@
                   </a:tcPr>
                 </a:tc>
               </a:tr>
-              <a:tr h="176784">
+              <a:tr h="165735">
                 <a:tc>
                   <a:txBody>
                     <a:bodyPr wrap="square"/>
@@ -15983,7 +15983,7 @@
                   </a:tcPr>
                 </a:tc>
               </a:tr>
-              <a:tr h="176784">
+              <a:tr h="165735">
                 <a:tc>
                   <a:txBody>
                     <a:bodyPr wrap="square"/>
@@ -16146,7 +16146,7 @@
                   </a:tcPr>
                 </a:tc>
               </a:tr>
-              <a:tr h="176784">
+              <a:tr h="165735">
                 <a:tc>
                   <a:txBody>
                     <a:bodyPr wrap="square"/>
@@ -16299,6 +16299,332 @@
                           <a:latin typeface="Segoe UI"/>
                         </a:rPr>
                         <a:t>Plus MP4, WAV, AIFF - RNNoise model, speech-trained</a:t>
+                      </a:r>
+                    </a:p>
+                  </a:txBody>
+                  <a:tcPr anchor="ctr" marL="54864" marR="54864" marT="18288" marB="18288">
+                    <a:solidFill>
+                      <a:srgbClr val="FFFFFF"/>
+                    </a:solidFill>
+                  </a:tcPr>
+                </a:tc>
+              </a:tr>
+              <a:tr h="165735">
+                <a:tc>
+                  <a:txBody>
+                    <a:bodyPr wrap="square"/>
+                    <a:lstStyle/>
+                    <a:p>
+                      <a:pPr algn="l"/>
+                      <a:r>
+                        <a:rPr sz="800" b="0" i="0">
+                          <a:solidFill>
+                            <a:srgbClr val="2E2E2E"/>
+                          </a:solidFill>
+                          <a:latin typeface="Segoe UI"/>
+                        </a:rPr>
+                        <a:t>Restoration (Declip)</a:t>
+                      </a:r>
+                    </a:p>
+                  </a:txBody>
+                  <a:tcPr anchor="ctr" marL="54864" marR="54864" marT="18288" marB="18288">
+                    <a:solidFill>
+                      <a:srgbClr val="F7F7F7"/>
+                    </a:solidFill>
+                  </a:tcPr>
+                </a:tc>
+                <a:tc>
+                  <a:txBody>
+                    <a:bodyPr wrap="square"/>
+                    <a:lstStyle/>
+                    <a:p>
+                      <a:pPr algn="ctr"/>
+                      <a:r>
+                        <a:rPr sz="800" b="0" i="0">
+                          <a:solidFill>
+                            <a:srgbClr val="2E2E2E"/>
+                          </a:solidFill>
+                          <a:latin typeface="Segoe UI"/>
+                        </a:rPr>
+                        <a:t>✓</a:t>
+                      </a:r>
+                    </a:p>
+                  </a:txBody>
+                  <a:tcPr anchor="ctr" marL="54864" marR="54864" marT="18288" marB="18288">
+                    <a:solidFill>
+                      <a:srgbClr val="F7F7F7"/>
+                    </a:solidFill>
+                  </a:tcPr>
+                </a:tc>
+                <a:tc>
+                  <a:txBody>
+                    <a:bodyPr wrap="square"/>
+                    <a:lstStyle/>
+                    <a:p>
+                      <a:pPr algn="ctr"/>
+                      <a:r>
+                        <a:rPr sz="800" b="0" i="0">
+                          <a:solidFill>
+                            <a:srgbClr val="2E2E2E"/>
+                          </a:solidFill>
+                          <a:latin typeface="Segoe UI"/>
+                        </a:rPr>
+                        <a:t>✓</a:t>
+                      </a:r>
+                    </a:p>
+                  </a:txBody>
+                  <a:tcPr anchor="ctr" marL="54864" marR="54864" marT="18288" marB="18288">
+                    <a:solidFill>
+                      <a:srgbClr val="F7F7F7"/>
+                    </a:solidFill>
+                  </a:tcPr>
+                </a:tc>
+                <a:tc>
+                  <a:txBody>
+                    <a:bodyPr wrap="square"/>
+                    <a:lstStyle/>
+                    <a:p>
+                      <a:pPr algn="ctr"/>
+                      <a:r>
+                        <a:rPr sz="800" b="0" i="0">
+                          <a:solidFill>
+                            <a:srgbClr val="2E2E2E"/>
+                          </a:solidFill>
+                          <a:latin typeface="Segoe UI"/>
+                        </a:rPr>
+                        <a:t>✓</a:t>
+                      </a:r>
+                    </a:p>
+                  </a:txBody>
+                  <a:tcPr anchor="ctr" marL="54864" marR="54864" marT="18288" marB="18288">
+                    <a:solidFill>
+                      <a:srgbClr val="F7F7F7"/>
+                    </a:solidFill>
+                  </a:tcPr>
+                </a:tc>
+                <a:tc>
+                  <a:txBody>
+                    <a:bodyPr wrap="square"/>
+                    <a:lstStyle/>
+                    <a:p>
+                      <a:pPr algn="ctr"/>
+                      <a:r>
+                        <a:rPr sz="800" b="0" i="0">
+                          <a:solidFill>
+                            <a:srgbClr val="2E2E2E"/>
+                          </a:solidFill>
+                          <a:latin typeface="Segoe UI"/>
+                        </a:rPr>
+                        <a:t>✓</a:t>
+                      </a:r>
+                    </a:p>
+                  </a:txBody>
+                  <a:tcPr anchor="ctr" marL="54864" marR="54864" marT="18288" marB="18288">
+                    <a:solidFill>
+                      <a:srgbClr val="F7F7F7"/>
+                    </a:solidFill>
+                  </a:tcPr>
+                </a:tc>
+                <a:tc>
+                  <a:txBody>
+                    <a:bodyPr wrap="square"/>
+                    <a:lstStyle/>
+                    <a:p>
+                      <a:pPr algn="ctr"/>
+                      <a:r>
+                        <a:rPr sz="800" b="0" i="0">
+                          <a:solidFill>
+                            <a:srgbClr val="2E2E2E"/>
+                          </a:solidFill>
+                          <a:latin typeface="Segoe UI"/>
+                        </a:rPr>
+                        <a:t>✓</a:t>
+                      </a:r>
+                    </a:p>
+                  </a:txBody>
+                  <a:tcPr anchor="ctr" marL="54864" marR="54864" marT="18288" marB="18288">
+                    <a:solidFill>
+                      <a:srgbClr val="F7F7F7"/>
+                    </a:solidFill>
+                  </a:tcPr>
+                </a:tc>
+                <a:tc>
+                  <a:txBody>
+                    <a:bodyPr wrap="square"/>
+                    <a:lstStyle/>
+                    <a:p>
+                      <a:pPr algn="l"/>
+                      <a:r>
+                        <a:rPr sz="800" b="0" i="0">
+                          <a:solidFill>
+                            <a:srgbClr val="2E2E2E"/>
+                          </a:solidFill>
+                          <a:latin typeface="Segoe UI"/>
+                        </a:rPr>
+                        <a:t>Rebuilds clipped peaks in place - all shared suite formats</a:t>
+                      </a:r>
+                    </a:p>
+                  </a:txBody>
+                  <a:tcPr anchor="ctr" marL="54864" marR="54864" marT="18288" marB="18288">
+                    <a:solidFill>
+                      <a:srgbClr val="F7F7F7"/>
+                    </a:solidFill>
+                  </a:tcPr>
+                </a:tc>
+              </a:tr>
+              <a:tr h="165735">
+                <a:tc>
+                  <a:txBody>
+                    <a:bodyPr wrap="square"/>
+                    <a:lstStyle/>
+                    <a:p>
+                      <a:pPr algn="l"/>
+                      <a:r>
+                        <a:rPr sz="800" b="0" i="0">
+                          <a:solidFill>
+                            <a:srgbClr val="2E2E2E"/>
+                          </a:solidFill>
+                          <a:latin typeface="Segoe UI"/>
+                        </a:rPr>
+                        <a:t>Duplicate Finder</a:t>
+                      </a:r>
+                    </a:p>
+                  </a:txBody>
+                  <a:tcPr anchor="ctr" marL="54864" marR="54864" marT="18288" marB="18288">
+                    <a:solidFill>
+                      <a:srgbClr val="FFFFFF"/>
+                    </a:solidFill>
+                  </a:tcPr>
+                </a:tc>
+                <a:tc>
+                  <a:txBody>
+                    <a:bodyPr wrap="square"/>
+                    <a:lstStyle/>
+                    <a:p>
+                      <a:pPr algn="ctr"/>
+                      <a:r>
+                        <a:rPr sz="800" b="0" i="0">
+                          <a:solidFill>
+                            <a:srgbClr val="2E2E2E"/>
+                          </a:solidFill>
+                          <a:latin typeface="Segoe UI"/>
+                        </a:rPr>
+                        <a:t>✓</a:t>
+                      </a:r>
+                    </a:p>
+                  </a:txBody>
+                  <a:tcPr anchor="ctr" marL="54864" marR="54864" marT="18288" marB="18288">
+                    <a:solidFill>
+                      <a:srgbClr val="FFFFFF"/>
+                    </a:solidFill>
+                  </a:tcPr>
+                </a:tc>
+                <a:tc>
+                  <a:txBody>
+                    <a:bodyPr wrap="square"/>
+                    <a:lstStyle/>
+                    <a:p>
+                      <a:pPr algn="ctr"/>
+                      <a:r>
+                        <a:rPr sz="800" b="0" i="0">
+                          <a:solidFill>
+                            <a:srgbClr val="2E2E2E"/>
+                          </a:solidFill>
+                          <a:latin typeface="Segoe UI"/>
+                        </a:rPr>
+                        <a:t>✓</a:t>
+                      </a:r>
+                    </a:p>
+                  </a:txBody>
+                  <a:tcPr anchor="ctr" marL="54864" marR="54864" marT="18288" marB="18288">
+                    <a:solidFill>
+                      <a:srgbClr val="FFFFFF"/>
+                    </a:solidFill>
+                  </a:tcPr>
+                </a:tc>
+                <a:tc>
+                  <a:txBody>
+                    <a:bodyPr wrap="square"/>
+                    <a:lstStyle/>
+                    <a:p>
+                      <a:pPr algn="ctr"/>
+                      <a:r>
+                        <a:rPr sz="800" b="0" i="0">
+                          <a:solidFill>
+                            <a:srgbClr val="2E2E2E"/>
+                          </a:solidFill>
+                          <a:latin typeface="Segoe UI"/>
+                        </a:rPr>
+                        <a:t>✓</a:t>
+                      </a:r>
+                    </a:p>
+                  </a:txBody>
+                  <a:tcPr anchor="ctr" marL="54864" marR="54864" marT="18288" marB="18288">
+                    <a:solidFill>
+                      <a:srgbClr val="FFFFFF"/>
+                    </a:solidFill>
+                  </a:tcPr>
+                </a:tc>
+                <a:tc>
+                  <a:txBody>
+                    <a:bodyPr wrap="square"/>
+                    <a:lstStyle/>
+                    <a:p>
+                      <a:pPr algn="ctr"/>
+                      <a:r>
+                        <a:rPr sz="800" b="0" i="0">
+                          <a:solidFill>
+                            <a:srgbClr val="2E2E2E"/>
+                          </a:solidFill>
+                          <a:latin typeface="Segoe UI"/>
+                        </a:rPr>
+                        <a:t>✓</a:t>
+                      </a:r>
+                    </a:p>
+                  </a:txBody>
+                  <a:tcPr anchor="ctr" marL="54864" marR="54864" marT="18288" marB="18288">
+                    <a:solidFill>
+                      <a:srgbClr val="FFFFFF"/>
+                    </a:solidFill>
+                  </a:tcPr>
+                </a:tc>
+                <a:tc>
+                  <a:txBody>
+                    <a:bodyPr wrap="square"/>
+                    <a:lstStyle/>
+                    <a:p>
+                      <a:pPr algn="ctr"/>
+                      <a:r>
+                        <a:rPr sz="800" b="0" i="0">
+                          <a:solidFill>
+                            <a:srgbClr val="2E2E2E"/>
+                          </a:solidFill>
+                          <a:latin typeface="Segoe UI"/>
+                        </a:rPr>
+                        <a:t>✓</a:t>
+                      </a:r>
+                    </a:p>
+                  </a:txBody>
+                  <a:tcPr anchor="ctr" marL="54864" marR="54864" marT="18288" marB="18288">
+                    <a:solidFill>
+                      <a:srgbClr val="FFFFFF"/>
+                    </a:solidFill>
+                  </a:tcPr>
+                </a:tc>
+                <a:tc>
+                  <a:txBody>
+                    <a:bodyPr wrap="square"/>
+                    <a:lstStyle/>
+                    <a:p>
+                      <a:pPr algn="l"/>
+                      <a:r>
+                        <a:rPr sz="800" b="0" i="0">
+                          <a:solidFill>
+                            <a:srgbClr val="2E2E2E"/>
+                          </a:solidFill>
+                          <a:latin typeface="Segoe UI"/>
+                        </a:rPr>
+                        <a:t>Read-only scan: fingerprints the shared formats, never writes audio</a:t>
                       </a:r>
                     </a:p>
                   </a:txBody>
@@ -18409,7 +18735,7 @@
                 </a:solidFill>
                 <a:latin typeface="Segoe UI"/>
               </a:rPr>
-              <a:t>The Suite Overview - how the 30 tools are grouped, and which one to reach for (documentation/docs/user/suite-overview.md)</a:t>
+              <a:t>The Suite Overview - how the 32 tools are grouped, and which one to reach for (documentation/docs/user/suite-overview.md)</a:t>
             </a:r>
           </a:p>
           <a:p>
@@ -19402,7 +19728,7 @@
                 </a:solidFill>
                 <a:latin typeface="Segoe UI"/>
               </a:rPr>
-              <a:t>Point it at a music folder and it runs a configured set of tools in a fixed, dependency-aware order - no need to open 30 separate windows.</a:t>
+              <a:t>Point it at a music folder and it runs a configured set of tools in a fixed, dependency-aware order - no need to open 32 separate windows.</a:t>
             </a:r>
           </a:p>
           <a:p>
